--- a/docs/pptx/auc3/ritu-auc3-linsubhr-egfrdisc-akikdigo.pptx
+++ b/docs/pptx/auc3/ritu-auc3-linsubhr-egfrdisc-akikdigo.pptx
@@ -2443,7 +2443,7 @@
           </p:nvSpPr>
           <p:spPr>
             <a:xfrm>
-              <a:off x="2040316" y="2073503"/>
+              <a:off x="2044638" y="2073503"/>
               <a:ext cx="0" cy="3649639"/>
             </a:xfrm>
             <a:custGeom>
@@ -2486,7 +2486,7 @@
           </p:nvSpPr>
           <p:spPr>
             <a:xfrm>
-              <a:off x="4520982" y="2073503"/>
+              <a:off x="4520586" y="2073503"/>
               <a:ext cx="0" cy="3649639"/>
             </a:xfrm>
             <a:custGeom>
@@ -2529,7 +2529,7 @@
           </p:nvSpPr>
           <p:spPr>
             <a:xfrm>
-              <a:off x="7001648" y="2073503"/>
+              <a:off x="6996534" y="2073503"/>
               <a:ext cx="0" cy="3649639"/>
             </a:xfrm>
             <a:custGeom>
@@ -2787,7 +2787,7 @@
           </p:nvSpPr>
           <p:spPr>
             <a:xfrm>
-              <a:off x="3280649" y="2073503"/>
+              <a:off x="3282612" y="2073503"/>
               <a:ext cx="0" cy="3649639"/>
             </a:xfrm>
             <a:custGeom>
@@ -2830,7 +2830,7 @@
           </p:nvSpPr>
           <p:spPr>
             <a:xfrm>
-              <a:off x="5761315" y="2073503"/>
+              <a:off x="5758560" y="2073503"/>
               <a:ext cx="0" cy="3649639"/>
             </a:xfrm>
             <a:custGeom>
@@ -2873,7 +2873,7 @@
           </p:nvSpPr>
           <p:spPr>
             <a:xfrm>
-              <a:off x="8241981" y="2073503"/>
+              <a:off x="8234508" y="2073503"/>
               <a:ext cx="0" cy="3649639"/>
             </a:xfrm>
             <a:custGeom>
@@ -2916,453 +2916,453 @@
           </p:nvSpPr>
           <p:spPr>
             <a:xfrm>
-              <a:off x="1502830" y="2073503"/>
-              <a:ext cx="6759848" cy="3453647"/>
+              <a:off x="1513685" y="2073503"/>
+              <a:ext cx="6748994" cy="3453724"/>
             </a:xfrm>
             <a:custGeom>
               <a:avLst/>
               <a:pathLst>
-                <a:path w="6759848" h="3453647">
+                <a:path w="6748994" h="3453724">
                   <a:moveTo>
-                    <a:pt x="3169461" y="0"/>
+                    <a:pt x="3163310" y="0"/>
                   </a:moveTo>
                   <a:lnTo>
-                    <a:pt x="3178722" y="44210"/>
-                  </a:lnTo>
-                  <a:lnTo>
-                    <a:pt x="3250345" y="355211"/>
-                  </a:lnTo>
-                  <a:lnTo>
-                    <a:pt x="3321967" y="638091"/>
-                  </a:lnTo>
-                  <a:lnTo>
-                    <a:pt x="3393590" y="895394"/>
-                  </a:lnTo>
-                  <a:lnTo>
-                    <a:pt x="3465212" y="1129431"/>
-                  </a:lnTo>
-                  <a:lnTo>
-                    <a:pt x="3536835" y="1342307"/>
-                  </a:lnTo>
-                  <a:lnTo>
-                    <a:pt x="3608457" y="1535934"/>
-                  </a:lnTo>
-                  <a:lnTo>
-                    <a:pt x="3680080" y="1712054"/>
-                  </a:lnTo>
-                  <a:lnTo>
-                    <a:pt x="3751702" y="1872250"/>
-                  </a:lnTo>
-                  <a:lnTo>
-                    <a:pt x="3823325" y="2017960"/>
-                  </a:lnTo>
-                  <a:lnTo>
-                    <a:pt x="3894947" y="2150496"/>
-                  </a:lnTo>
-                  <a:lnTo>
-                    <a:pt x="3966570" y="2271047"/>
-                  </a:lnTo>
-                  <a:lnTo>
-                    <a:pt x="4038192" y="2380699"/>
-                  </a:lnTo>
-                  <a:lnTo>
-                    <a:pt x="4109815" y="2480436"/>
-                  </a:lnTo>
-                  <a:lnTo>
-                    <a:pt x="4181438" y="2571155"/>
-                  </a:lnTo>
-                  <a:lnTo>
-                    <a:pt x="4253060" y="2653671"/>
-                  </a:lnTo>
-                  <a:lnTo>
-                    <a:pt x="4324683" y="2673933"/>
-                  </a:lnTo>
-                  <a:lnTo>
-                    <a:pt x="4396305" y="2693265"/>
-                  </a:lnTo>
-                  <a:lnTo>
-                    <a:pt x="4467928" y="2712137"/>
-                  </a:lnTo>
-                  <a:lnTo>
-                    <a:pt x="4539550" y="2730558"/>
-                  </a:lnTo>
-                  <a:lnTo>
-                    <a:pt x="4611173" y="2748539"/>
-                  </a:lnTo>
-                  <a:lnTo>
-                    <a:pt x="4682795" y="2766090"/>
-                  </a:lnTo>
-                  <a:lnTo>
-                    <a:pt x="4754418" y="2783223"/>
-                  </a:lnTo>
-                  <a:lnTo>
-                    <a:pt x="4826040" y="2799947"/>
-                  </a:lnTo>
-                  <a:lnTo>
-                    <a:pt x="4897663" y="2816271"/>
-                  </a:lnTo>
-                  <a:lnTo>
-                    <a:pt x="4969285" y="2832206"/>
-                  </a:lnTo>
-                  <a:lnTo>
-                    <a:pt x="5040908" y="2847761"/>
-                  </a:lnTo>
-                  <a:lnTo>
-                    <a:pt x="5112530" y="2862944"/>
-                  </a:lnTo>
-                  <a:lnTo>
-                    <a:pt x="5184153" y="2877764"/>
-                  </a:lnTo>
-                  <a:lnTo>
-                    <a:pt x="5255775" y="2892231"/>
-                  </a:lnTo>
-                  <a:lnTo>
-                    <a:pt x="5327398" y="2906352"/>
-                  </a:lnTo>
-                  <a:lnTo>
-                    <a:pt x="5399020" y="2920137"/>
-                  </a:lnTo>
-                  <a:lnTo>
-                    <a:pt x="5470643" y="2933592"/>
-                  </a:lnTo>
-                  <a:lnTo>
-                    <a:pt x="5542266" y="2946726"/>
-                  </a:lnTo>
-                  <a:lnTo>
-                    <a:pt x="5613888" y="2959546"/>
-                  </a:lnTo>
-                  <a:lnTo>
-                    <a:pt x="5685511" y="2972061"/>
-                  </a:lnTo>
-                  <a:lnTo>
-                    <a:pt x="5757133" y="2984276"/>
-                  </a:lnTo>
-                  <a:lnTo>
-                    <a:pt x="5828756" y="2996200"/>
-                  </a:lnTo>
-                  <a:lnTo>
-                    <a:pt x="5900378" y="3007839"/>
-                  </a:lnTo>
-                  <a:lnTo>
-                    <a:pt x="5972001" y="3019201"/>
-                  </a:lnTo>
-                  <a:lnTo>
-                    <a:pt x="6043623" y="3030291"/>
-                  </a:lnTo>
-                  <a:lnTo>
-                    <a:pt x="6115246" y="3041117"/>
-                  </a:lnTo>
-                  <a:lnTo>
-                    <a:pt x="6186868" y="3051684"/>
-                  </a:lnTo>
-                  <a:lnTo>
-                    <a:pt x="6258491" y="3061998"/>
-                  </a:lnTo>
-                  <a:lnTo>
-                    <a:pt x="6330113" y="3072067"/>
-                  </a:lnTo>
-                  <a:lnTo>
-                    <a:pt x="6401736" y="3081895"/>
-                  </a:lnTo>
-                  <a:lnTo>
-                    <a:pt x="6473358" y="3091488"/>
-                  </a:lnTo>
-                  <a:lnTo>
-                    <a:pt x="6544981" y="3100853"/>
-                  </a:lnTo>
-                  <a:lnTo>
-                    <a:pt x="6616603" y="3109994"/>
-                  </a:lnTo>
-                  <a:lnTo>
-                    <a:pt x="6688226" y="3118917"/>
-                  </a:lnTo>
-                  <a:lnTo>
-                    <a:pt x="6759848" y="3127626"/>
-                  </a:lnTo>
-                  <a:lnTo>
-                    <a:pt x="6759848" y="3453647"/>
-                  </a:lnTo>
-                  <a:lnTo>
-                    <a:pt x="6688226" y="3450655"/>
-                  </a:lnTo>
-                  <a:lnTo>
-                    <a:pt x="6616603" y="3447365"/>
-                  </a:lnTo>
-                  <a:lnTo>
-                    <a:pt x="6544981" y="3443749"/>
-                  </a:lnTo>
-                  <a:lnTo>
-                    <a:pt x="6473358" y="3439773"/>
-                  </a:lnTo>
-                  <a:lnTo>
-                    <a:pt x="6401736" y="3435401"/>
-                  </a:lnTo>
-                  <a:lnTo>
-                    <a:pt x="6330113" y="3430595"/>
-                  </a:lnTo>
-                  <a:lnTo>
-                    <a:pt x="6258491" y="3425312"/>
-                  </a:lnTo>
-                  <a:lnTo>
-                    <a:pt x="6186868" y="3419503"/>
-                  </a:lnTo>
-                  <a:lnTo>
-                    <a:pt x="6115246" y="3413116"/>
-                  </a:lnTo>
-                  <a:lnTo>
-                    <a:pt x="6043623" y="3406095"/>
-                  </a:lnTo>
-                  <a:lnTo>
-                    <a:pt x="5972001" y="3398376"/>
-                  </a:lnTo>
-                  <a:lnTo>
-                    <a:pt x="5900378" y="3389890"/>
-                  </a:lnTo>
-                  <a:lnTo>
-                    <a:pt x="5828756" y="3380560"/>
-                  </a:lnTo>
-                  <a:lnTo>
-                    <a:pt x="5757133" y="3370302"/>
-                  </a:lnTo>
-                  <a:lnTo>
-                    <a:pt x="5685511" y="3359025"/>
-                  </a:lnTo>
-                  <a:lnTo>
-                    <a:pt x="5613888" y="3346627"/>
-                  </a:lnTo>
-                  <a:lnTo>
-                    <a:pt x="5542266" y="3332996"/>
-                  </a:lnTo>
-                  <a:lnTo>
-                    <a:pt x="5470643" y="3318010"/>
-                  </a:lnTo>
-                  <a:lnTo>
-                    <a:pt x="5399020" y="3301534"/>
-                  </a:lnTo>
-                  <a:lnTo>
-                    <a:pt x="5327398" y="3283421"/>
-                  </a:lnTo>
-                  <a:lnTo>
-                    <a:pt x="5255775" y="3263507"/>
-                  </a:lnTo>
-                  <a:lnTo>
-                    <a:pt x="5184153" y="3241614"/>
-                  </a:lnTo>
-                  <a:lnTo>
-                    <a:pt x="5112530" y="3217544"/>
-                  </a:lnTo>
-                  <a:lnTo>
-                    <a:pt x="5040908" y="3191081"/>
-                  </a:lnTo>
-                  <a:lnTo>
-                    <a:pt x="4969285" y="3161988"/>
-                  </a:lnTo>
-                  <a:lnTo>
-                    <a:pt x="4897663" y="3130003"/>
-                  </a:lnTo>
-                  <a:lnTo>
-                    <a:pt x="4826040" y="3094838"/>
-                  </a:lnTo>
-                  <a:lnTo>
-                    <a:pt x="4754418" y="3056178"/>
-                  </a:lnTo>
-                  <a:lnTo>
-                    <a:pt x="4682795" y="3013674"/>
-                  </a:lnTo>
-                  <a:lnTo>
-                    <a:pt x="4611173" y="2966945"/>
-                  </a:lnTo>
-                  <a:lnTo>
-                    <a:pt x="4539550" y="2915571"/>
-                  </a:lnTo>
-                  <a:lnTo>
-                    <a:pt x="4467928" y="2859090"/>
-                  </a:lnTo>
-                  <a:lnTo>
-                    <a:pt x="4396305" y="2796994"/>
-                  </a:lnTo>
-                  <a:lnTo>
-                    <a:pt x="4324683" y="2728726"/>
-                  </a:lnTo>
-                  <a:lnTo>
-                    <a:pt x="4253060" y="2654127"/>
-                  </a:lnTo>
-                  <a:lnTo>
-                    <a:pt x="4181438" y="2633837"/>
-                  </a:lnTo>
-                  <a:lnTo>
-                    <a:pt x="4109815" y="2613050"/>
-                  </a:lnTo>
-                  <a:lnTo>
-                    <a:pt x="4038192" y="2591756"/>
-                  </a:lnTo>
-                  <a:lnTo>
-                    <a:pt x="3966570" y="2569940"/>
-                  </a:lnTo>
-                  <a:lnTo>
-                    <a:pt x="3894947" y="2547591"/>
-                  </a:lnTo>
-                  <a:lnTo>
-                    <a:pt x="3823325" y="2524695"/>
-                  </a:lnTo>
-                  <a:lnTo>
-                    <a:pt x="3751702" y="2501240"/>
-                  </a:lnTo>
-                  <a:lnTo>
-                    <a:pt x="3680080" y="2477211"/>
-                  </a:lnTo>
-                  <a:lnTo>
-                    <a:pt x="3608457" y="2452594"/>
-                  </a:lnTo>
-                  <a:lnTo>
-                    <a:pt x="3536835" y="2427375"/>
-                  </a:lnTo>
-                  <a:lnTo>
-                    <a:pt x="3465212" y="2401539"/>
-                  </a:lnTo>
-                  <a:lnTo>
-                    <a:pt x="3393590" y="2375071"/>
-                  </a:lnTo>
-                  <a:lnTo>
-                    <a:pt x="3321967" y="2347956"/>
-                  </a:lnTo>
-                  <a:lnTo>
-                    <a:pt x="3250345" y="2320178"/>
-                  </a:lnTo>
-                  <a:lnTo>
-                    <a:pt x="3178722" y="2291720"/>
-                  </a:lnTo>
-                  <a:lnTo>
-                    <a:pt x="3107100" y="2262567"/>
-                  </a:lnTo>
-                  <a:lnTo>
-                    <a:pt x="3035477" y="2232700"/>
-                  </a:lnTo>
-                  <a:lnTo>
-                    <a:pt x="2963855" y="2202103"/>
-                  </a:lnTo>
-                  <a:lnTo>
-                    <a:pt x="2892232" y="2170758"/>
-                  </a:lnTo>
-                  <a:lnTo>
-                    <a:pt x="2820610" y="2138646"/>
-                  </a:lnTo>
-                  <a:lnTo>
-                    <a:pt x="2748987" y="2105749"/>
-                  </a:lnTo>
-                  <a:lnTo>
-                    <a:pt x="2677364" y="2072047"/>
-                  </a:lnTo>
-                  <a:lnTo>
-                    <a:pt x="2605742" y="2037521"/>
-                  </a:lnTo>
-                  <a:lnTo>
-                    <a:pt x="2534119" y="2002150"/>
-                  </a:lnTo>
-                  <a:lnTo>
-                    <a:pt x="2462497" y="1965915"/>
-                  </a:lnTo>
-                  <a:lnTo>
-                    <a:pt x="2390874" y="1928793"/>
-                  </a:lnTo>
-                  <a:lnTo>
-                    <a:pt x="2319252" y="1890763"/>
-                  </a:lnTo>
-                  <a:lnTo>
-                    <a:pt x="2247629" y="1851804"/>
-                  </a:lnTo>
-                  <a:lnTo>
-                    <a:pt x="2176007" y="1811891"/>
-                  </a:lnTo>
-                  <a:lnTo>
-                    <a:pt x="2104384" y="1771002"/>
-                  </a:lnTo>
-                  <a:lnTo>
-                    <a:pt x="2032762" y="1729114"/>
-                  </a:lnTo>
-                  <a:lnTo>
-                    <a:pt x="1961139" y="1686200"/>
-                  </a:lnTo>
-                  <a:lnTo>
-                    <a:pt x="1889517" y="1642238"/>
-                  </a:lnTo>
-                  <a:lnTo>
-                    <a:pt x="1817894" y="1597200"/>
-                  </a:lnTo>
-                  <a:lnTo>
-                    <a:pt x="1746272" y="1551060"/>
-                  </a:lnTo>
-                  <a:lnTo>
-                    <a:pt x="1674649" y="1503792"/>
-                  </a:lnTo>
-                  <a:lnTo>
-                    <a:pt x="1603027" y="1455368"/>
-                  </a:lnTo>
-                  <a:lnTo>
-                    <a:pt x="1531404" y="1405760"/>
-                  </a:lnTo>
-                  <a:lnTo>
-                    <a:pt x="1459782" y="1354938"/>
-                  </a:lnTo>
-                  <a:lnTo>
-                    <a:pt x="1388159" y="1302874"/>
-                  </a:lnTo>
-                  <a:lnTo>
-                    <a:pt x="1316536" y="1249536"/>
-                  </a:lnTo>
-                  <a:lnTo>
-                    <a:pt x="1244914" y="1194894"/>
-                  </a:lnTo>
-                  <a:lnTo>
-                    <a:pt x="1173291" y="1138915"/>
-                  </a:lnTo>
-                  <a:lnTo>
-                    <a:pt x="1101669" y="1081567"/>
-                  </a:lnTo>
-                  <a:lnTo>
-                    <a:pt x="1030046" y="1022817"/>
-                  </a:lnTo>
-                  <a:lnTo>
-                    <a:pt x="958424" y="962630"/>
-                  </a:lnTo>
-                  <a:lnTo>
-                    <a:pt x="886801" y="900970"/>
-                  </a:lnTo>
-                  <a:lnTo>
-                    <a:pt x="815179" y="837803"/>
-                  </a:lnTo>
-                  <a:lnTo>
-                    <a:pt x="743556" y="773091"/>
-                  </a:lnTo>
-                  <a:lnTo>
-                    <a:pt x="671934" y="706796"/>
-                  </a:lnTo>
-                  <a:lnTo>
-                    <a:pt x="600311" y="638880"/>
-                  </a:lnTo>
-                  <a:lnTo>
-                    <a:pt x="528689" y="569303"/>
-                  </a:lnTo>
-                  <a:lnTo>
-                    <a:pt x="457066" y="498024"/>
-                  </a:lnTo>
-                  <a:lnTo>
-                    <a:pt x="385444" y="425002"/>
-                  </a:lnTo>
-                  <a:lnTo>
-                    <a:pt x="313821" y="350194"/>
-                  </a:lnTo>
-                  <a:lnTo>
-                    <a:pt x="242199" y="273556"/>
-                  </a:lnTo>
-                  <a:lnTo>
-                    <a:pt x="170576" y="195044"/>
-                  </a:lnTo>
-                  <a:lnTo>
-                    <a:pt x="98954" y="114612"/>
-                  </a:lnTo>
-                  <a:lnTo>
-                    <a:pt x="27331" y="32213"/>
+                    <a:pt x="3167868" y="21941"/>
+                  </a:lnTo>
+                  <a:lnTo>
+                    <a:pt x="3239490" y="335524"/>
+                  </a:lnTo>
+                  <a:lnTo>
+                    <a:pt x="3311113" y="620702"/>
+                  </a:lnTo>
+                  <a:lnTo>
+                    <a:pt x="3382735" y="880047"/>
+                  </a:lnTo>
+                  <a:lnTo>
+                    <a:pt x="3454358" y="1115900"/>
+                  </a:lnTo>
+                  <a:lnTo>
+                    <a:pt x="3525980" y="1330388"/>
+                  </a:lnTo>
+                  <a:lnTo>
+                    <a:pt x="3597603" y="1525448"/>
+                  </a:lnTo>
+                  <a:lnTo>
+                    <a:pt x="3669225" y="1702838"/>
+                  </a:lnTo>
+                  <a:lnTo>
+                    <a:pt x="3740848" y="1864159"/>
+                  </a:lnTo>
+                  <a:lnTo>
+                    <a:pt x="3812470" y="2010867"/>
+                  </a:lnTo>
+                  <a:lnTo>
+                    <a:pt x="3884093" y="2144286"/>
+                  </a:lnTo>
+                  <a:lnTo>
+                    <a:pt x="3955715" y="2265619"/>
+                  </a:lnTo>
+                  <a:lnTo>
+                    <a:pt x="4027338" y="2375962"/>
+                  </a:lnTo>
+                  <a:lnTo>
+                    <a:pt x="4098960" y="2476309"/>
+                  </a:lnTo>
+                  <a:lnTo>
+                    <a:pt x="4170583" y="2567567"/>
+                  </a:lnTo>
+                  <a:lnTo>
+                    <a:pt x="4242205" y="2650558"/>
+                  </a:lnTo>
+                  <a:lnTo>
+                    <a:pt x="4313828" y="2673197"/>
+                  </a:lnTo>
+                  <a:lnTo>
+                    <a:pt x="4385450" y="2692583"/>
+                  </a:lnTo>
+                  <a:lnTo>
+                    <a:pt x="4457073" y="2711507"/>
+                  </a:lnTo>
+                  <a:lnTo>
+                    <a:pt x="4528696" y="2729977"/>
+                  </a:lnTo>
+                  <a:lnTo>
+                    <a:pt x="4600318" y="2748006"/>
+                  </a:lnTo>
+                  <a:lnTo>
+                    <a:pt x="4671941" y="2765603"/>
+                  </a:lnTo>
+                  <a:lnTo>
+                    <a:pt x="4743563" y="2782780"/>
+                  </a:lnTo>
+                  <a:lnTo>
+                    <a:pt x="4815186" y="2799546"/>
+                  </a:lnTo>
+                  <a:lnTo>
+                    <a:pt x="4886808" y="2815911"/>
+                  </a:lnTo>
+                  <a:lnTo>
+                    <a:pt x="4958431" y="2831884"/>
+                  </a:lnTo>
+                  <a:lnTo>
+                    <a:pt x="5030053" y="2847475"/>
+                  </a:lnTo>
+                  <a:lnTo>
+                    <a:pt x="5101676" y="2862694"/>
+                  </a:lnTo>
+                  <a:lnTo>
+                    <a:pt x="5173298" y="2877548"/>
+                  </a:lnTo>
+                  <a:lnTo>
+                    <a:pt x="5244921" y="2892047"/>
+                  </a:lnTo>
+                  <a:lnTo>
+                    <a:pt x="5316543" y="2906200"/>
+                  </a:lnTo>
+                  <a:lnTo>
+                    <a:pt x="5388166" y="2920014"/>
+                  </a:lnTo>
+                  <a:lnTo>
+                    <a:pt x="5459788" y="2933497"/>
+                  </a:lnTo>
+                  <a:lnTo>
+                    <a:pt x="5531411" y="2946658"/>
+                  </a:lnTo>
+                  <a:lnTo>
+                    <a:pt x="5603033" y="2959504"/>
+                  </a:lnTo>
+                  <a:lnTo>
+                    <a:pt x="5674656" y="2972043"/>
+                  </a:lnTo>
+                  <a:lnTo>
+                    <a:pt x="5746278" y="2984282"/>
+                  </a:lnTo>
+                  <a:lnTo>
+                    <a:pt x="5817901" y="2996228"/>
+                  </a:lnTo>
+                  <a:lnTo>
+                    <a:pt x="5889524" y="3007889"/>
+                  </a:lnTo>
+                  <a:lnTo>
+                    <a:pt x="5961146" y="3019270"/>
+                  </a:lnTo>
+                  <a:lnTo>
+                    <a:pt x="6032769" y="3030380"/>
+                  </a:lnTo>
+                  <a:lnTo>
+                    <a:pt x="6104391" y="3041223"/>
+                  </a:lnTo>
+                  <a:lnTo>
+                    <a:pt x="6176014" y="3051808"/>
+                  </a:lnTo>
+                  <a:lnTo>
+                    <a:pt x="6247636" y="3062139"/>
+                  </a:lnTo>
+                  <a:lnTo>
+                    <a:pt x="6319259" y="3072223"/>
+                  </a:lnTo>
+                  <a:lnTo>
+                    <a:pt x="6390881" y="3082066"/>
+                  </a:lnTo>
+                  <a:lnTo>
+                    <a:pt x="6462504" y="3091673"/>
+                  </a:lnTo>
+                  <a:lnTo>
+                    <a:pt x="6534126" y="3101051"/>
+                  </a:lnTo>
+                  <a:lnTo>
+                    <a:pt x="6605749" y="3110204"/>
+                  </a:lnTo>
+                  <a:lnTo>
+                    <a:pt x="6677371" y="3119139"/>
+                  </a:lnTo>
+                  <a:lnTo>
+                    <a:pt x="6748994" y="3127860"/>
+                  </a:lnTo>
+                  <a:lnTo>
+                    <a:pt x="6748994" y="3453724"/>
+                  </a:lnTo>
+                  <a:lnTo>
+                    <a:pt x="6677371" y="3450734"/>
+                  </a:lnTo>
+                  <a:lnTo>
+                    <a:pt x="6605749" y="3447446"/>
+                  </a:lnTo>
+                  <a:lnTo>
+                    <a:pt x="6534126" y="3443830"/>
+                  </a:lnTo>
+                  <a:lnTo>
+                    <a:pt x="6462504" y="3439854"/>
+                  </a:lnTo>
+                  <a:lnTo>
+                    <a:pt x="6390881" y="3435482"/>
+                  </a:lnTo>
+                  <a:lnTo>
+                    <a:pt x="6319259" y="3430675"/>
+                  </a:lnTo>
+                  <a:lnTo>
+                    <a:pt x="6247636" y="3425389"/>
+                  </a:lnTo>
+                  <a:lnTo>
+                    <a:pt x="6176014" y="3419576"/>
+                  </a:lnTo>
+                  <a:lnTo>
+                    <a:pt x="6104391" y="3413184"/>
+                  </a:lnTo>
+                  <a:lnTo>
+                    <a:pt x="6032769" y="3406155"/>
+                  </a:lnTo>
+                  <a:lnTo>
+                    <a:pt x="5961146" y="3398427"/>
+                  </a:lnTo>
+                  <a:lnTo>
+                    <a:pt x="5889524" y="3389928"/>
+                  </a:lnTo>
+                  <a:lnTo>
+                    <a:pt x="5817901" y="3380584"/>
+                  </a:lnTo>
+                  <a:lnTo>
+                    <a:pt x="5746278" y="3370308"/>
+                  </a:lnTo>
+                  <a:lnTo>
+                    <a:pt x="5674656" y="3359009"/>
+                  </a:lnTo>
+                  <a:lnTo>
+                    <a:pt x="5603033" y="3346584"/>
+                  </a:lnTo>
+                  <a:lnTo>
+                    <a:pt x="5531411" y="3332922"/>
+                  </a:lnTo>
+                  <a:lnTo>
+                    <a:pt x="5459788" y="3317899"/>
+                  </a:lnTo>
+                  <a:lnTo>
+                    <a:pt x="5388166" y="3301379"/>
+                  </a:lnTo>
+                  <a:lnTo>
+                    <a:pt x="5316543" y="3283214"/>
+                  </a:lnTo>
+                  <a:lnTo>
+                    <a:pt x="5244921" y="3263240"/>
+                  </a:lnTo>
+                  <a:lnTo>
+                    <a:pt x="5173298" y="3241276"/>
+                  </a:lnTo>
+                  <a:lnTo>
+                    <a:pt x="5101676" y="3217124"/>
+                  </a:lnTo>
+                  <a:lnTo>
+                    <a:pt x="5030053" y="3190567"/>
+                  </a:lnTo>
+                  <a:lnTo>
+                    <a:pt x="4958431" y="3161364"/>
+                  </a:lnTo>
+                  <a:lnTo>
+                    <a:pt x="4886808" y="3129253"/>
+                  </a:lnTo>
+                  <a:lnTo>
+                    <a:pt x="4815186" y="3093943"/>
+                  </a:lnTo>
+                  <a:lnTo>
+                    <a:pt x="4743563" y="3055116"/>
+                  </a:lnTo>
+                  <a:lnTo>
+                    <a:pt x="4671941" y="3012422"/>
+                  </a:lnTo>
+                  <a:lnTo>
+                    <a:pt x="4600318" y="2965475"/>
+                  </a:lnTo>
+                  <a:lnTo>
+                    <a:pt x="4528696" y="2913852"/>
+                  </a:lnTo>
+                  <a:lnTo>
+                    <a:pt x="4457073" y="2857087"/>
+                  </a:lnTo>
+                  <a:lnTo>
+                    <a:pt x="4385450" y="2794668"/>
+                  </a:lnTo>
+                  <a:lnTo>
+                    <a:pt x="4313828" y="2726031"/>
+                  </a:lnTo>
+                  <a:lnTo>
+                    <a:pt x="4242205" y="2653335"/>
+                  </a:lnTo>
+                  <a:lnTo>
+                    <a:pt x="4170583" y="2632986"/>
+                  </a:lnTo>
+                  <a:lnTo>
+                    <a:pt x="4098960" y="2612139"/>
+                  </a:lnTo>
+                  <a:lnTo>
+                    <a:pt x="4027338" y="2590781"/>
+                  </a:lnTo>
+                  <a:lnTo>
+                    <a:pt x="3955715" y="2568899"/>
+                  </a:lnTo>
+                  <a:lnTo>
+                    <a:pt x="3884093" y="2546482"/>
+                  </a:lnTo>
+                  <a:lnTo>
+                    <a:pt x="3812470" y="2523515"/>
+                  </a:lnTo>
+                  <a:lnTo>
+                    <a:pt x="3740848" y="2499985"/>
+                  </a:lnTo>
+                  <a:lnTo>
+                    <a:pt x="3669225" y="2475879"/>
+                  </a:lnTo>
+                  <a:lnTo>
+                    <a:pt x="3597603" y="2451182"/>
+                  </a:lnTo>
+                  <a:lnTo>
+                    <a:pt x="3525980" y="2425879"/>
+                  </a:lnTo>
+                  <a:lnTo>
+                    <a:pt x="3454358" y="2399957"/>
+                  </a:lnTo>
+                  <a:lnTo>
+                    <a:pt x="3382735" y="2373400"/>
+                  </a:lnTo>
+                  <a:lnTo>
+                    <a:pt x="3311113" y="2346192"/>
+                  </a:lnTo>
+                  <a:lnTo>
+                    <a:pt x="3239490" y="2318317"/>
+                  </a:lnTo>
+                  <a:lnTo>
+                    <a:pt x="3167868" y="2289759"/>
+                  </a:lnTo>
+                  <a:lnTo>
+                    <a:pt x="3096245" y="2260501"/>
+                  </a:lnTo>
+                  <a:lnTo>
+                    <a:pt x="3024622" y="2230526"/>
+                  </a:lnTo>
+                  <a:lnTo>
+                    <a:pt x="2953000" y="2199817"/>
+                  </a:lnTo>
+                  <a:lnTo>
+                    <a:pt x="2881377" y="2168355"/>
+                  </a:lnTo>
+                  <a:lnTo>
+                    <a:pt x="2809755" y="2136123"/>
+                  </a:lnTo>
+                  <a:lnTo>
+                    <a:pt x="2738132" y="2103100"/>
+                  </a:lnTo>
+                  <a:lnTo>
+                    <a:pt x="2666510" y="2069268"/>
+                  </a:lnTo>
+                  <a:lnTo>
+                    <a:pt x="2594887" y="2034608"/>
+                  </a:lnTo>
+                  <a:lnTo>
+                    <a:pt x="2523265" y="1999098"/>
+                  </a:lnTo>
+                  <a:lnTo>
+                    <a:pt x="2451642" y="1962718"/>
+                  </a:lnTo>
+                  <a:lnTo>
+                    <a:pt x="2380020" y="1925446"/>
+                  </a:lnTo>
+                  <a:lnTo>
+                    <a:pt x="2308397" y="1887261"/>
+                  </a:lnTo>
+                  <a:lnTo>
+                    <a:pt x="2236775" y="1848140"/>
+                  </a:lnTo>
+                  <a:lnTo>
+                    <a:pt x="2165152" y="1808061"/>
+                  </a:lnTo>
+                  <a:lnTo>
+                    <a:pt x="2093530" y="1767000"/>
+                  </a:lnTo>
+                  <a:lnTo>
+                    <a:pt x="2021907" y="1724932"/>
+                  </a:lnTo>
+                  <a:lnTo>
+                    <a:pt x="1950285" y="1681834"/>
+                  </a:lnTo>
+                  <a:lnTo>
+                    <a:pt x="1878662" y="1637679"/>
+                  </a:lnTo>
+                  <a:lnTo>
+                    <a:pt x="1807040" y="1592443"/>
+                  </a:lnTo>
+                  <a:lnTo>
+                    <a:pt x="1735417" y="1546098"/>
+                  </a:lnTo>
+                  <a:lnTo>
+                    <a:pt x="1663794" y="1498617"/>
+                  </a:lnTo>
+                  <a:lnTo>
+                    <a:pt x="1592172" y="1449973"/>
+                  </a:lnTo>
+                  <a:lnTo>
+                    <a:pt x="1520549" y="1400137"/>
+                  </a:lnTo>
+                  <a:lnTo>
+                    <a:pt x="1448927" y="1349080"/>
+                  </a:lnTo>
+                  <a:lnTo>
+                    <a:pt x="1377304" y="1296771"/>
+                  </a:lnTo>
+                  <a:lnTo>
+                    <a:pt x="1305682" y="1243181"/>
+                  </a:lnTo>
+                  <a:lnTo>
+                    <a:pt x="1234059" y="1188278"/>
+                  </a:lnTo>
+                  <a:lnTo>
+                    <a:pt x="1162437" y="1132029"/>
+                  </a:lnTo>
+                  <a:lnTo>
+                    <a:pt x="1090814" y="1074402"/>
+                  </a:lnTo>
+                  <a:lnTo>
+                    <a:pt x="1019192" y="1015363"/>
+                  </a:lnTo>
+                  <a:lnTo>
+                    <a:pt x="947569" y="954877"/>
+                  </a:lnTo>
+                  <a:lnTo>
+                    <a:pt x="875947" y="892909"/>
+                  </a:lnTo>
+                  <a:lnTo>
+                    <a:pt x="804324" y="829423"/>
+                  </a:lnTo>
+                  <a:lnTo>
+                    <a:pt x="732702" y="764380"/>
+                  </a:lnTo>
+                  <a:lnTo>
+                    <a:pt x="661079" y="697744"/>
+                  </a:lnTo>
+                  <a:lnTo>
+                    <a:pt x="589457" y="629476"/>
+                  </a:lnTo>
+                  <a:lnTo>
+                    <a:pt x="517834" y="559534"/>
+                  </a:lnTo>
+                  <a:lnTo>
+                    <a:pt x="446212" y="487878"/>
+                  </a:lnTo>
+                  <a:lnTo>
+                    <a:pt x="374589" y="414467"/>
+                  </a:lnTo>
+                  <a:lnTo>
+                    <a:pt x="302966" y="339256"/>
+                  </a:lnTo>
+                  <a:lnTo>
+                    <a:pt x="231344" y="262203"/>
+                  </a:lnTo>
+                  <a:lnTo>
+                    <a:pt x="159721" y="183262"/>
+                  </a:lnTo>
+                  <a:lnTo>
+                    <a:pt x="88099" y="102386"/>
+                  </a:lnTo>
+                  <a:lnTo>
+                    <a:pt x="16476" y="19528"/>
                   </a:lnTo>
                   <a:lnTo>
                     <a:pt x="0" y="0"/>
@@ -3391,168 +3391,168 @@
           </p:nvSpPr>
           <p:spPr>
             <a:xfrm>
-              <a:off x="4672292" y="2073503"/>
-              <a:ext cx="3590387" cy="3127626"/>
+              <a:off x="4676995" y="2073503"/>
+              <a:ext cx="3585683" cy="3127860"/>
             </a:xfrm>
             <a:custGeom>
               <a:avLst/>
               <a:pathLst>
-                <a:path w="3590387" h="3127626">
+                <a:path w="3585683" h="3127860">
                   <a:moveTo>
                     <a:pt x="0" y="0"/>
                   </a:moveTo>
                   <a:lnTo>
-                    <a:pt x="9260" y="44210"/>
-                  </a:lnTo>
-                  <a:lnTo>
-                    <a:pt x="80883" y="355211"/>
-                  </a:lnTo>
-                  <a:lnTo>
-                    <a:pt x="152505" y="638091"/>
-                  </a:lnTo>
-                  <a:lnTo>
-                    <a:pt x="224128" y="895394"/>
-                  </a:lnTo>
-                  <a:lnTo>
-                    <a:pt x="295751" y="1129431"/>
-                  </a:lnTo>
-                  <a:lnTo>
-                    <a:pt x="367373" y="1342307"/>
-                  </a:lnTo>
-                  <a:lnTo>
-                    <a:pt x="438996" y="1535934"/>
-                  </a:lnTo>
-                  <a:lnTo>
-                    <a:pt x="510618" y="1712054"/>
-                  </a:lnTo>
-                  <a:lnTo>
-                    <a:pt x="582241" y="1872250"/>
-                  </a:lnTo>
-                  <a:lnTo>
-                    <a:pt x="653863" y="2017960"/>
-                  </a:lnTo>
-                  <a:lnTo>
-                    <a:pt x="725486" y="2150496"/>
-                  </a:lnTo>
-                  <a:lnTo>
-                    <a:pt x="797108" y="2271047"/>
-                  </a:lnTo>
-                  <a:lnTo>
-                    <a:pt x="868731" y="2380699"/>
-                  </a:lnTo>
-                  <a:lnTo>
-                    <a:pt x="940353" y="2480436"/>
-                  </a:lnTo>
-                  <a:lnTo>
-                    <a:pt x="1011976" y="2571155"/>
-                  </a:lnTo>
-                  <a:lnTo>
-                    <a:pt x="1083598" y="2653671"/>
-                  </a:lnTo>
-                  <a:lnTo>
-                    <a:pt x="1155221" y="2673933"/>
-                  </a:lnTo>
-                  <a:lnTo>
-                    <a:pt x="1226843" y="2693265"/>
-                  </a:lnTo>
-                  <a:lnTo>
-                    <a:pt x="1298466" y="2712137"/>
-                  </a:lnTo>
-                  <a:lnTo>
-                    <a:pt x="1370088" y="2730558"/>
-                  </a:lnTo>
-                  <a:lnTo>
-                    <a:pt x="1441711" y="2748539"/>
-                  </a:lnTo>
-                  <a:lnTo>
-                    <a:pt x="1513333" y="2766090"/>
-                  </a:lnTo>
-                  <a:lnTo>
-                    <a:pt x="1584956" y="2783223"/>
-                  </a:lnTo>
-                  <a:lnTo>
-                    <a:pt x="1656579" y="2799947"/>
-                  </a:lnTo>
-                  <a:lnTo>
-                    <a:pt x="1728201" y="2816271"/>
-                  </a:lnTo>
-                  <a:lnTo>
-                    <a:pt x="1799824" y="2832206"/>
-                  </a:lnTo>
-                  <a:lnTo>
-                    <a:pt x="1871446" y="2847761"/>
-                  </a:lnTo>
-                  <a:lnTo>
-                    <a:pt x="1943069" y="2862944"/>
-                  </a:lnTo>
-                  <a:lnTo>
-                    <a:pt x="2014691" y="2877764"/>
-                  </a:lnTo>
-                  <a:lnTo>
-                    <a:pt x="2086314" y="2892231"/>
-                  </a:lnTo>
-                  <a:lnTo>
-                    <a:pt x="2157936" y="2906352"/>
-                  </a:lnTo>
-                  <a:lnTo>
-                    <a:pt x="2229559" y="2920137"/>
-                  </a:lnTo>
-                  <a:lnTo>
-                    <a:pt x="2301181" y="2933592"/>
-                  </a:lnTo>
-                  <a:lnTo>
-                    <a:pt x="2372804" y="2946726"/>
-                  </a:lnTo>
-                  <a:lnTo>
-                    <a:pt x="2444426" y="2959546"/>
-                  </a:lnTo>
-                  <a:lnTo>
-                    <a:pt x="2516049" y="2972061"/>
-                  </a:lnTo>
-                  <a:lnTo>
-                    <a:pt x="2587671" y="2984276"/>
-                  </a:lnTo>
-                  <a:lnTo>
-                    <a:pt x="2659294" y="2996200"/>
-                  </a:lnTo>
-                  <a:lnTo>
-                    <a:pt x="2730916" y="3007839"/>
-                  </a:lnTo>
-                  <a:lnTo>
-                    <a:pt x="2802539" y="3019201"/>
-                  </a:lnTo>
-                  <a:lnTo>
-                    <a:pt x="2874161" y="3030291"/>
-                  </a:lnTo>
-                  <a:lnTo>
-                    <a:pt x="2945784" y="3041117"/>
-                  </a:lnTo>
-                  <a:lnTo>
-                    <a:pt x="3017407" y="3051684"/>
-                  </a:lnTo>
-                  <a:lnTo>
-                    <a:pt x="3089029" y="3061998"/>
-                  </a:lnTo>
-                  <a:lnTo>
-                    <a:pt x="3160652" y="3072067"/>
-                  </a:lnTo>
-                  <a:lnTo>
-                    <a:pt x="3232274" y="3081895"/>
-                  </a:lnTo>
-                  <a:lnTo>
-                    <a:pt x="3303897" y="3091488"/>
-                  </a:lnTo>
-                  <a:lnTo>
-                    <a:pt x="3375519" y="3100853"/>
-                  </a:lnTo>
-                  <a:lnTo>
-                    <a:pt x="3447142" y="3109994"/>
-                  </a:lnTo>
-                  <a:lnTo>
-                    <a:pt x="3518764" y="3118917"/>
-                  </a:lnTo>
-                  <a:lnTo>
-                    <a:pt x="3590387" y="3127626"/>
+                    <a:pt x="4557" y="21941"/>
+                  </a:lnTo>
+                  <a:lnTo>
+                    <a:pt x="76180" y="335524"/>
+                  </a:lnTo>
+                  <a:lnTo>
+                    <a:pt x="147802" y="620702"/>
+                  </a:lnTo>
+                  <a:lnTo>
+                    <a:pt x="219425" y="880047"/>
+                  </a:lnTo>
+                  <a:lnTo>
+                    <a:pt x="291047" y="1115900"/>
+                  </a:lnTo>
+                  <a:lnTo>
+                    <a:pt x="362670" y="1330388"/>
+                  </a:lnTo>
+                  <a:lnTo>
+                    <a:pt x="434292" y="1525448"/>
+                  </a:lnTo>
+                  <a:lnTo>
+                    <a:pt x="505915" y="1702838"/>
+                  </a:lnTo>
+                  <a:lnTo>
+                    <a:pt x="577537" y="1864159"/>
+                  </a:lnTo>
+                  <a:lnTo>
+                    <a:pt x="649160" y="2010867"/>
+                  </a:lnTo>
+                  <a:lnTo>
+                    <a:pt x="720782" y="2144286"/>
+                  </a:lnTo>
+                  <a:lnTo>
+                    <a:pt x="792405" y="2265619"/>
+                  </a:lnTo>
+                  <a:lnTo>
+                    <a:pt x="864027" y="2375962"/>
+                  </a:lnTo>
+                  <a:lnTo>
+                    <a:pt x="935650" y="2476309"/>
+                  </a:lnTo>
+                  <a:lnTo>
+                    <a:pt x="1007272" y="2567567"/>
+                  </a:lnTo>
+                  <a:lnTo>
+                    <a:pt x="1078895" y="2650558"/>
+                  </a:lnTo>
+                  <a:lnTo>
+                    <a:pt x="1150517" y="2673197"/>
+                  </a:lnTo>
+                  <a:lnTo>
+                    <a:pt x="1222140" y="2692583"/>
+                  </a:lnTo>
+                  <a:lnTo>
+                    <a:pt x="1293762" y="2711507"/>
+                  </a:lnTo>
+                  <a:lnTo>
+                    <a:pt x="1365385" y="2729977"/>
+                  </a:lnTo>
+                  <a:lnTo>
+                    <a:pt x="1437008" y="2748006"/>
+                  </a:lnTo>
+                  <a:lnTo>
+                    <a:pt x="1508630" y="2765603"/>
+                  </a:lnTo>
+                  <a:lnTo>
+                    <a:pt x="1580253" y="2782780"/>
+                  </a:lnTo>
+                  <a:lnTo>
+                    <a:pt x="1651875" y="2799546"/>
+                  </a:lnTo>
+                  <a:lnTo>
+                    <a:pt x="1723498" y="2815911"/>
+                  </a:lnTo>
+                  <a:lnTo>
+                    <a:pt x="1795120" y="2831884"/>
+                  </a:lnTo>
+                  <a:lnTo>
+                    <a:pt x="1866743" y="2847475"/>
+                  </a:lnTo>
+                  <a:lnTo>
+                    <a:pt x="1938365" y="2862694"/>
+                  </a:lnTo>
+                  <a:lnTo>
+                    <a:pt x="2009988" y="2877548"/>
+                  </a:lnTo>
+                  <a:lnTo>
+                    <a:pt x="2081610" y="2892047"/>
+                  </a:lnTo>
+                  <a:lnTo>
+                    <a:pt x="2153233" y="2906200"/>
+                  </a:lnTo>
+                  <a:lnTo>
+                    <a:pt x="2224855" y="2920014"/>
+                  </a:lnTo>
+                  <a:lnTo>
+                    <a:pt x="2296478" y="2933497"/>
+                  </a:lnTo>
+                  <a:lnTo>
+                    <a:pt x="2368100" y="2946658"/>
+                  </a:lnTo>
+                  <a:lnTo>
+                    <a:pt x="2439723" y="2959504"/>
+                  </a:lnTo>
+                  <a:lnTo>
+                    <a:pt x="2511345" y="2972043"/>
+                  </a:lnTo>
+                  <a:lnTo>
+                    <a:pt x="2582968" y="2984282"/>
+                  </a:lnTo>
+                  <a:lnTo>
+                    <a:pt x="2654590" y="2996228"/>
+                  </a:lnTo>
+                  <a:lnTo>
+                    <a:pt x="2726213" y="3007889"/>
+                  </a:lnTo>
+                  <a:lnTo>
+                    <a:pt x="2797836" y="3019270"/>
+                  </a:lnTo>
+                  <a:lnTo>
+                    <a:pt x="2869458" y="3030380"/>
+                  </a:lnTo>
+                  <a:lnTo>
+                    <a:pt x="2941081" y="3041223"/>
+                  </a:lnTo>
+                  <a:lnTo>
+                    <a:pt x="3012703" y="3051808"/>
+                  </a:lnTo>
+                  <a:lnTo>
+                    <a:pt x="3084326" y="3062139"/>
+                  </a:lnTo>
+                  <a:lnTo>
+                    <a:pt x="3155948" y="3072223"/>
+                  </a:lnTo>
+                  <a:lnTo>
+                    <a:pt x="3227571" y="3082066"/>
+                  </a:lnTo>
+                  <a:lnTo>
+                    <a:pt x="3299193" y="3091673"/>
+                  </a:lnTo>
+                  <a:lnTo>
+                    <a:pt x="3370816" y="3101051"/>
+                  </a:lnTo>
+                  <a:lnTo>
+                    <a:pt x="3442438" y="3110204"/>
+                  </a:lnTo>
+                  <a:lnTo>
+                    <a:pt x="3514061" y="3119139"/>
+                  </a:lnTo>
+                  <a:lnTo>
+                    <a:pt x="3585683" y="3127860"/>
                   </a:lnTo>
                 </a:path>
               </a:pathLst>
@@ -3572,297 +3572,297 @@
           </p:nvSpPr>
           <p:spPr>
             <a:xfrm>
-              <a:off x="1502830" y="2073503"/>
-              <a:ext cx="6759848" cy="3453647"/>
+              <a:off x="1513685" y="2073503"/>
+              <a:ext cx="6748994" cy="3453724"/>
             </a:xfrm>
             <a:custGeom>
               <a:avLst/>
               <a:pathLst>
-                <a:path w="6759848" h="3453647">
+                <a:path w="6748994" h="3453724">
                   <a:moveTo>
-                    <a:pt x="6759848" y="3453647"/>
+                    <a:pt x="6748994" y="3453724"/>
                   </a:moveTo>
                   <a:lnTo>
-                    <a:pt x="6688226" y="3450655"/>
-                  </a:lnTo>
-                  <a:lnTo>
-                    <a:pt x="6616603" y="3447365"/>
-                  </a:lnTo>
-                  <a:lnTo>
-                    <a:pt x="6544981" y="3443749"/>
-                  </a:lnTo>
-                  <a:lnTo>
-                    <a:pt x="6473358" y="3439773"/>
-                  </a:lnTo>
-                  <a:lnTo>
-                    <a:pt x="6401736" y="3435401"/>
-                  </a:lnTo>
-                  <a:lnTo>
-                    <a:pt x="6330113" y="3430595"/>
-                  </a:lnTo>
-                  <a:lnTo>
-                    <a:pt x="6258491" y="3425312"/>
-                  </a:lnTo>
-                  <a:lnTo>
-                    <a:pt x="6186868" y="3419503"/>
-                  </a:lnTo>
-                  <a:lnTo>
-                    <a:pt x="6115246" y="3413116"/>
-                  </a:lnTo>
-                  <a:lnTo>
-                    <a:pt x="6043623" y="3406095"/>
-                  </a:lnTo>
-                  <a:lnTo>
-                    <a:pt x="5972001" y="3398376"/>
-                  </a:lnTo>
-                  <a:lnTo>
-                    <a:pt x="5900378" y="3389890"/>
-                  </a:lnTo>
-                  <a:lnTo>
-                    <a:pt x="5828756" y="3380560"/>
-                  </a:lnTo>
-                  <a:lnTo>
-                    <a:pt x="5757133" y="3370302"/>
-                  </a:lnTo>
-                  <a:lnTo>
-                    <a:pt x="5685511" y="3359025"/>
-                  </a:lnTo>
-                  <a:lnTo>
-                    <a:pt x="5613888" y="3346627"/>
-                  </a:lnTo>
-                  <a:lnTo>
-                    <a:pt x="5542266" y="3332996"/>
-                  </a:lnTo>
-                  <a:lnTo>
-                    <a:pt x="5470643" y="3318010"/>
-                  </a:lnTo>
-                  <a:lnTo>
-                    <a:pt x="5399020" y="3301534"/>
-                  </a:lnTo>
-                  <a:lnTo>
-                    <a:pt x="5327398" y="3283421"/>
-                  </a:lnTo>
-                  <a:lnTo>
-                    <a:pt x="5255775" y="3263507"/>
-                  </a:lnTo>
-                  <a:lnTo>
-                    <a:pt x="5184153" y="3241614"/>
-                  </a:lnTo>
-                  <a:lnTo>
-                    <a:pt x="5112530" y="3217544"/>
-                  </a:lnTo>
-                  <a:lnTo>
-                    <a:pt x="5040908" y="3191081"/>
-                  </a:lnTo>
-                  <a:lnTo>
-                    <a:pt x="4969285" y="3161988"/>
-                  </a:lnTo>
-                  <a:lnTo>
-                    <a:pt x="4897663" y="3130003"/>
-                  </a:lnTo>
-                  <a:lnTo>
-                    <a:pt x="4826040" y="3094838"/>
-                  </a:lnTo>
-                  <a:lnTo>
-                    <a:pt x="4754418" y="3056178"/>
-                  </a:lnTo>
-                  <a:lnTo>
-                    <a:pt x="4682795" y="3013674"/>
-                  </a:lnTo>
-                  <a:lnTo>
-                    <a:pt x="4611173" y="2966945"/>
-                  </a:lnTo>
-                  <a:lnTo>
-                    <a:pt x="4539550" y="2915571"/>
-                  </a:lnTo>
-                  <a:lnTo>
-                    <a:pt x="4467928" y="2859090"/>
-                  </a:lnTo>
-                  <a:lnTo>
-                    <a:pt x="4396305" y="2796994"/>
-                  </a:lnTo>
-                  <a:lnTo>
-                    <a:pt x="4324683" y="2728726"/>
-                  </a:lnTo>
-                  <a:lnTo>
-                    <a:pt x="4253060" y="2654127"/>
-                  </a:lnTo>
-                  <a:lnTo>
-                    <a:pt x="4181438" y="2633837"/>
-                  </a:lnTo>
-                  <a:lnTo>
-                    <a:pt x="4109815" y="2613050"/>
-                  </a:lnTo>
-                  <a:lnTo>
-                    <a:pt x="4038192" y="2591756"/>
-                  </a:lnTo>
-                  <a:lnTo>
-                    <a:pt x="3966570" y="2569940"/>
-                  </a:lnTo>
-                  <a:lnTo>
-                    <a:pt x="3894947" y="2547591"/>
-                  </a:lnTo>
-                  <a:lnTo>
-                    <a:pt x="3823325" y="2524695"/>
-                  </a:lnTo>
-                  <a:lnTo>
-                    <a:pt x="3751702" y="2501240"/>
-                  </a:lnTo>
-                  <a:lnTo>
-                    <a:pt x="3680080" y="2477211"/>
-                  </a:lnTo>
-                  <a:lnTo>
-                    <a:pt x="3608457" y="2452594"/>
-                  </a:lnTo>
-                  <a:lnTo>
-                    <a:pt x="3536835" y="2427375"/>
-                  </a:lnTo>
-                  <a:lnTo>
-                    <a:pt x="3465212" y="2401539"/>
-                  </a:lnTo>
-                  <a:lnTo>
-                    <a:pt x="3393590" y="2375071"/>
-                  </a:lnTo>
-                  <a:lnTo>
-                    <a:pt x="3321967" y="2347956"/>
-                  </a:lnTo>
-                  <a:lnTo>
-                    <a:pt x="3250345" y="2320178"/>
-                  </a:lnTo>
-                  <a:lnTo>
-                    <a:pt x="3178722" y="2291720"/>
-                  </a:lnTo>
-                  <a:lnTo>
-                    <a:pt x="3107100" y="2262567"/>
-                  </a:lnTo>
-                  <a:lnTo>
-                    <a:pt x="3035477" y="2232700"/>
-                  </a:lnTo>
-                  <a:lnTo>
-                    <a:pt x="2963855" y="2202103"/>
-                  </a:lnTo>
-                  <a:lnTo>
-                    <a:pt x="2892232" y="2170758"/>
-                  </a:lnTo>
-                  <a:lnTo>
-                    <a:pt x="2820610" y="2138646"/>
-                  </a:lnTo>
-                  <a:lnTo>
-                    <a:pt x="2748987" y="2105749"/>
-                  </a:lnTo>
-                  <a:lnTo>
-                    <a:pt x="2677364" y="2072047"/>
-                  </a:lnTo>
-                  <a:lnTo>
-                    <a:pt x="2605742" y="2037521"/>
-                  </a:lnTo>
-                  <a:lnTo>
-                    <a:pt x="2534119" y="2002150"/>
-                  </a:lnTo>
-                  <a:lnTo>
-                    <a:pt x="2462497" y="1965915"/>
-                  </a:lnTo>
-                  <a:lnTo>
-                    <a:pt x="2390874" y="1928793"/>
-                  </a:lnTo>
-                  <a:lnTo>
-                    <a:pt x="2319252" y="1890763"/>
-                  </a:lnTo>
-                  <a:lnTo>
-                    <a:pt x="2247629" y="1851804"/>
-                  </a:lnTo>
-                  <a:lnTo>
-                    <a:pt x="2176007" y="1811891"/>
-                  </a:lnTo>
-                  <a:lnTo>
-                    <a:pt x="2104384" y="1771002"/>
-                  </a:lnTo>
-                  <a:lnTo>
-                    <a:pt x="2032762" y="1729114"/>
-                  </a:lnTo>
-                  <a:lnTo>
-                    <a:pt x="1961139" y="1686200"/>
-                  </a:lnTo>
-                  <a:lnTo>
-                    <a:pt x="1889517" y="1642238"/>
-                  </a:lnTo>
-                  <a:lnTo>
-                    <a:pt x="1817894" y="1597200"/>
-                  </a:lnTo>
-                  <a:lnTo>
-                    <a:pt x="1746272" y="1551060"/>
-                  </a:lnTo>
-                  <a:lnTo>
-                    <a:pt x="1674649" y="1503792"/>
-                  </a:lnTo>
-                  <a:lnTo>
-                    <a:pt x="1603027" y="1455368"/>
-                  </a:lnTo>
-                  <a:lnTo>
-                    <a:pt x="1531404" y="1405760"/>
-                  </a:lnTo>
-                  <a:lnTo>
-                    <a:pt x="1459782" y="1354938"/>
-                  </a:lnTo>
-                  <a:lnTo>
-                    <a:pt x="1388159" y="1302874"/>
-                  </a:lnTo>
-                  <a:lnTo>
-                    <a:pt x="1316536" y="1249536"/>
-                  </a:lnTo>
-                  <a:lnTo>
-                    <a:pt x="1244914" y="1194894"/>
-                  </a:lnTo>
-                  <a:lnTo>
-                    <a:pt x="1173291" y="1138915"/>
-                  </a:lnTo>
-                  <a:lnTo>
-                    <a:pt x="1101669" y="1081567"/>
-                  </a:lnTo>
-                  <a:lnTo>
-                    <a:pt x="1030046" y="1022817"/>
-                  </a:lnTo>
-                  <a:lnTo>
-                    <a:pt x="958424" y="962630"/>
-                  </a:lnTo>
-                  <a:lnTo>
-                    <a:pt x="886801" y="900970"/>
-                  </a:lnTo>
-                  <a:lnTo>
-                    <a:pt x="815179" y="837803"/>
-                  </a:lnTo>
-                  <a:lnTo>
-                    <a:pt x="743556" y="773091"/>
-                  </a:lnTo>
-                  <a:lnTo>
-                    <a:pt x="671934" y="706796"/>
-                  </a:lnTo>
-                  <a:lnTo>
-                    <a:pt x="600311" y="638880"/>
-                  </a:lnTo>
-                  <a:lnTo>
-                    <a:pt x="528689" y="569303"/>
-                  </a:lnTo>
-                  <a:lnTo>
-                    <a:pt x="457066" y="498024"/>
-                  </a:lnTo>
-                  <a:lnTo>
-                    <a:pt x="385444" y="425002"/>
-                  </a:lnTo>
-                  <a:lnTo>
-                    <a:pt x="313821" y="350194"/>
-                  </a:lnTo>
-                  <a:lnTo>
-                    <a:pt x="242199" y="273556"/>
-                  </a:lnTo>
-                  <a:lnTo>
-                    <a:pt x="170576" y="195044"/>
-                  </a:lnTo>
-                  <a:lnTo>
-                    <a:pt x="98954" y="114612"/>
-                  </a:lnTo>
-                  <a:lnTo>
-                    <a:pt x="27331" y="32213"/>
+                    <a:pt x="6677371" y="3450734"/>
+                  </a:lnTo>
+                  <a:lnTo>
+                    <a:pt x="6605749" y="3447446"/>
+                  </a:lnTo>
+                  <a:lnTo>
+                    <a:pt x="6534126" y="3443830"/>
+                  </a:lnTo>
+                  <a:lnTo>
+                    <a:pt x="6462504" y="3439854"/>
+                  </a:lnTo>
+                  <a:lnTo>
+                    <a:pt x="6390881" y="3435482"/>
+                  </a:lnTo>
+                  <a:lnTo>
+                    <a:pt x="6319259" y="3430675"/>
+                  </a:lnTo>
+                  <a:lnTo>
+                    <a:pt x="6247636" y="3425389"/>
+                  </a:lnTo>
+                  <a:lnTo>
+                    <a:pt x="6176014" y="3419576"/>
+                  </a:lnTo>
+                  <a:lnTo>
+                    <a:pt x="6104391" y="3413184"/>
+                  </a:lnTo>
+                  <a:lnTo>
+                    <a:pt x="6032769" y="3406155"/>
+                  </a:lnTo>
+                  <a:lnTo>
+                    <a:pt x="5961146" y="3398427"/>
+                  </a:lnTo>
+                  <a:lnTo>
+                    <a:pt x="5889524" y="3389928"/>
+                  </a:lnTo>
+                  <a:lnTo>
+                    <a:pt x="5817901" y="3380584"/>
+                  </a:lnTo>
+                  <a:lnTo>
+                    <a:pt x="5746278" y="3370308"/>
+                  </a:lnTo>
+                  <a:lnTo>
+                    <a:pt x="5674656" y="3359009"/>
+                  </a:lnTo>
+                  <a:lnTo>
+                    <a:pt x="5603033" y="3346584"/>
+                  </a:lnTo>
+                  <a:lnTo>
+                    <a:pt x="5531411" y="3332922"/>
+                  </a:lnTo>
+                  <a:lnTo>
+                    <a:pt x="5459788" y="3317899"/>
+                  </a:lnTo>
+                  <a:lnTo>
+                    <a:pt x="5388166" y="3301379"/>
+                  </a:lnTo>
+                  <a:lnTo>
+                    <a:pt x="5316543" y="3283214"/>
+                  </a:lnTo>
+                  <a:lnTo>
+                    <a:pt x="5244921" y="3263240"/>
+                  </a:lnTo>
+                  <a:lnTo>
+                    <a:pt x="5173298" y="3241276"/>
+                  </a:lnTo>
+                  <a:lnTo>
+                    <a:pt x="5101676" y="3217124"/>
+                  </a:lnTo>
+                  <a:lnTo>
+                    <a:pt x="5030053" y="3190567"/>
+                  </a:lnTo>
+                  <a:lnTo>
+                    <a:pt x="4958431" y="3161364"/>
+                  </a:lnTo>
+                  <a:lnTo>
+                    <a:pt x="4886808" y="3129253"/>
+                  </a:lnTo>
+                  <a:lnTo>
+                    <a:pt x="4815186" y="3093943"/>
+                  </a:lnTo>
+                  <a:lnTo>
+                    <a:pt x="4743563" y="3055116"/>
+                  </a:lnTo>
+                  <a:lnTo>
+                    <a:pt x="4671941" y="3012422"/>
+                  </a:lnTo>
+                  <a:lnTo>
+                    <a:pt x="4600318" y="2965475"/>
+                  </a:lnTo>
+                  <a:lnTo>
+                    <a:pt x="4528696" y="2913852"/>
+                  </a:lnTo>
+                  <a:lnTo>
+                    <a:pt x="4457073" y="2857087"/>
+                  </a:lnTo>
+                  <a:lnTo>
+                    <a:pt x="4385450" y="2794668"/>
+                  </a:lnTo>
+                  <a:lnTo>
+                    <a:pt x="4313828" y="2726031"/>
+                  </a:lnTo>
+                  <a:lnTo>
+                    <a:pt x="4242205" y="2653335"/>
+                  </a:lnTo>
+                  <a:lnTo>
+                    <a:pt x="4170583" y="2632986"/>
+                  </a:lnTo>
+                  <a:lnTo>
+                    <a:pt x="4098960" y="2612139"/>
+                  </a:lnTo>
+                  <a:lnTo>
+                    <a:pt x="4027338" y="2590781"/>
+                  </a:lnTo>
+                  <a:lnTo>
+                    <a:pt x="3955715" y="2568899"/>
+                  </a:lnTo>
+                  <a:lnTo>
+                    <a:pt x="3884093" y="2546482"/>
+                  </a:lnTo>
+                  <a:lnTo>
+                    <a:pt x="3812470" y="2523515"/>
+                  </a:lnTo>
+                  <a:lnTo>
+                    <a:pt x="3740848" y="2499985"/>
+                  </a:lnTo>
+                  <a:lnTo>
+                    <a:pt x="3669225" y="2475879"/>
+                  </a:lnTo>
+                  <a:lnTo>
+                    <a:pt x="3597603" y="2451182"/>
+                  </a:lnTo>
+                  <a:lnTo>
+                    <a:pt x="3525980" y="2425879"/>
+                  </a:lnTo>
+                  <a:lnTo>
+                    <a:pt x="3454358" y="2399957"/>
+                  </a:lnTo>
+                  <a:lnTo>
+                    <a:pt x="3382735" y="2373400"/>
+                  </a:lnTo>
+                  <a:lnTo>
+                    <a:pt x="3311113" y="2346192"/>
+                  </a:lnTo>
+                  <a:lnTo>
+                    <a:pt x="3239490" y="2318317"/>
+                  </a:lnTo>
+                  <a:lnTo>
+                    <a:pt x="3167868" y="2289759"/>
+                  </a:lnTo>
+                  <a:lnTo>
+                    <a:pt x="3096245" y="2260501"/>
+                  </a:lnTo>
+                  <a:lnTo>
+                    <a:pt x="3024622" y="2230526"/>
+                  </a:lnTo>
+                  <a:lnTo>
+                    <a:pt x="2953000" y="2199817"/>
+                  </a:lnTo>
+                  <a:lnTo>
+                    <a:pt x="2881377" y="2168355"/>
+                  </a:lnTo>
+                  <a:lnTo>
+                    <a:pt x="2809755" y="2136123"/>
+                  </a:lnTo>
+                  <a:lnTo>
+                    <a:pt x="2738132" y="2103100"/>
+                  </a:lnTo>
+                  <a:lnTo>
+                    <a:pt x="2666510" y="2069268"/>
+                  </a:lnTo>
+                  <a:lnTo>
+                    <a:pt x="2594887" y="2034608"/>
+                  </a:lnTo>
+                  <a:lnTo>
+                    <a:pt x="2523265" y="1999098"/>
+                  </a:lnTo>
+                  <a:lnTo>
+                    <a:pt x="2451642" y="1962718"/>
+                  </a:lnTo>
+                  <a:lnTo>
+                    <a:pt x="2380020" y="1925446"/>
+                  </a:lnTo>
+                  <a:lnTo>
+                    <a:pt x="2308397" y="1887261"/>
+                  </a:lnTo>
+                  <a:lnTo>
+                    <a:pt x="2236775" y="1848140"/>
+                  </a:lnTo>
+                  <a:lnTo>
+                    <a:pt x="2165152" y="1808061"/>
+                  </a:lnTo>
+                  <a:lnTo>
+                    <a:pt x="2093530" y="1767000"/>
+                  </a:lnTo>
+                  <a:lnTo>
+                    <a:pt x="2021907" y="1724932"/>
+                  </a:lnTo>
+                  <a:lnTo>
+                    <a:pt x="1950285" y="1681834"/>
+                  </a:lnTo>
+                  <a:lnTo>
+                    <a:pt x="1878662" y="1637679"/>
+                  </a:lnTo>
+                  <a:lnTo>
+                    <a:pt x="1807040" y="1592443"/>
+                  </a:lnTo>
+                  <a:lnTo>
+                    <a:pt x="1735417" y="1546098"/>
+                  </a:lnTo>
+                  <a:lnTo>
+                    <a:pt x="1663794" y="1498617"/>
+                  </a:lnTo>
+                  <a:lnTo>
+                    <a:pt x="1592172" y="1449973"/>
+                  </a:lnTo>
+                  <a:lnTo>
+                    <a:pt x="1520549" y="1400137"/>
+                  </a:lnTo>
+                  <a:lnTo>
+                    <a:pt x="1448927" y="1349080"/>
+                  </a:lnTo>
+                  <a:lnTo>
+                    <a:pt x="1377304" y="1296771"/>
+                  </a:lnTo>
+                  <a:lnTo>
+                    <a:pt x="1305682" y="1243181"/>
+                  </a:lnTo>
+                  <a:lnTo>
+                    <a:pt x="1234059" y="1188278"/>
+                  </a:lnTo>
+                  <a:lnTo>
+                    <a:pt x="1162437" y="1132029"/>
+                  </a:lnTo>
+                  <a:lnTo>
+                    <a:pt x="1090814" y="1074402"/>
+                  </a:lnTo>
+                  <a:lnTo>
+                    <a:pt x="1019192" y="1015363"/>
+                  </a:lnTo>
+                  <a:lnTo>
+                    <a:pt x="947569" y="954877"/>
+                  </a:lnTo>
+                  <a:lnTo>
+                    <a:pt x="875947" y="892909"/>
+                  </a:lnTo>
+                  <a:lnTo>
+                    <a:pt x="804324" y="829423"/>
+                  </a:lnTo>
+                  <a:lnTo>
+                    <a:pt x="732702" y="764380"/>
+                  </a:lnTo>
+                  <a:lnTo>
+                    <a:pt x="661079" y="697744"/>
+                  </a:lnTo>
+                  <a:lnTo>
+                    <a:pt x="589457" y="629476"/>
+                  </a:lnTo>
+                  <a:lnTo>
+                    <a:pt x="517834" y="559534"/>
+                  </a:lnTo>
+                  <a:lnTo>
+                    <a:pt x="446212" y="487878"/>
+                  </a:lnTo>
+                  <a:lnTo>
+                    <a:pt x="374589" y="414467"/>
+                  </a:lnTo>
+                  <a:lnTo>
+                    <a:pt x="302966" y="339256"/>
+                  </a:lnTo>
+                  <a:lnTo>
+                    <a:pt x="231344" y="262203"/>
+                  </a:lnTo>
+                  <a:lnTo>
+                    <a:pt x="159721" y="183262"/>
+                  </a:lnTo>
+                  <a:lnTo>
+                    <a:pt x="88099" y="102386"/>
+                  </a:lnTo>
+                  <a:lnTo>
+                    <a:pt x="16476" y="19528"/>
                   </a:lnTo>
                   <a:lnTo>
                     <a:pt x="0" y="0"/>
@@ -3885,195 +3885,195 @@
           </p:nvSpPr>
           <p:spPr>
             <a:xfrm>
-              <a:off x="4028259" y="2073503"/>
-              <a:ext cx="4234420" cy="3380214"/>
+              <a:off x="4034218" y="2073503"/>
+              <a:ext cx="4228460" cy="3380381"/>
             </a:xfrm>
             <a:custGeom>
               <a:avLst/>
               <a:pathLst>
-                <a:path w="4234420" h="3380214">
+                <a:path w="4228460" h="3380381">
                   <a:moveTo>
                     <a:pt x="0" y="0"/>
                   </a:moveTo>
                   <a:lnTo>
-                    <a:pt x="8691" y="25711"/>
-                  </a:lnTo>
-                  <a:lnTo>
-                    <a:pt x="80313" y="225355"/>
-                  </a:lnTo>
-                  <a:lnTo>
-                    <a:pt x="151936" y="413474"/>
-                  </a:lnTo>
-                  <a:lnTo>
-                    <a:pt x="223558" y="590732"/>
-                  </a:lnTo>
-                  <a:lnTo>
-                    <a:pt x="295181" y="757756"/>
-                  </a:lnTo>
-                  <a:lnTo>
-                    <a:pt x="366803" y="915137"/>
-                  </a:lnTo>
-                  <a:lnTo>
-                    <a:pt x="438426" y="1063432"/>
-                  </a:lnTo>
-                  <a:lnTo>
-                    <a:pt x="510048" y="1203166"/>
-                  </a:lnTo>
-                  <a:lnTo>
-                    <a:pt x="581671" y="1334832"/>
-                  </a:lnTo>
-                  <a:lnTo>
-                    <a:pt x="653294" y="1458897"/>
-                  </a:lnTo>
-                  <a:lnTo>
-                    <a:pt x="724916" y="1575798"/>
-                  </a:lnTo>
-                  <a:lnTo>
-                    <a:pt x="796539" y="1685951"/>
-                  </a:lnTo>
-                  <a:lnTo>
-                    <a:pt x="868161" y="1789744"/>
-                  </a:lnTo>
-                  <a:lnTo>
-                    <a:pt x="939784" y="1887545"/>
-                  </a:lnTo>
-                  <a:lnTo>
-                    <a:pt x="1011406" y="1979700"/>
-                  </a:lnTo>
-                  <a:lnTo>
-                    <a:pt x="1083029" y="2066534"/>
-                  </a:lnTo>
-                  <a:lnTo>
-                    <a:pt x="1154651" y="2148354"/>
-                  </a:lnTo>
-                  <a:lnTo>
-                    <a:pt x="1226274" y="2225451"/>
-                  </a:lnTo>
-                  <a:lnTo>
-                    <a:pt x="1297896" y="2298097"/>
-                  </a:lnTo>
-                  <a:lnTo>
-                    <a:pt x="1369519" y="2366549"/>
-                  </a:lnTo>
-                  <a:lnTo>
-                    <a:pt x="1441141" y="2431049"/>
-                  </a:lnTo>
-                  <a:lnTo>
-                    <a:pt x="1512764" y="2491825"/>
-                  </a:lnTo>
-                  <a:lnTo>
-                    <a:pt x="1584386" y="2549092"/>
-                  </a:lnTo>
-                  <a:lnTo>
-                    <a:pt x="1656009" y="2603053"/>
-                  </a:lnTo>
-                  <a:lnTo>
-                    <a:pt x="1727631" y="2653899"/>
-                  </a:lnTo>
-                  <a:lnTo>
-                    <a:pt x="1799254" y="2701809"/>
-                  </a:lnTo>
-                  <a:lnTo>
-                    <a:pt x="1870876" y="2746953"/>
-                  </a:lnTo>
-                  <a:lnTo>
-                    <a:pt x="1942499" y="2789491"/>
-                  </a:lnTo>
-                  <a:lnTo>
-                    <a:pt x="2014122" y="2829573"/>
-                  </a:lnTo>
-                  <a:lnTo>
-                    <a:pt x="2085744" y="2867340"/>
-                  </a:lnTo>
-                  <a:lnTo>
-                    <a:pt x="2157367" y="2902928"/>
-                  </a:lnTo>
-                  <a:lnTo>
-                    <a:pt x="2228989" y="2936460"/>
-                  </a:lnTo>
-                  <a:lnTo>
-                    <a:pt x="2300612" y="2968057"/>
-                  </a:lnTo>
-                  <a:lnTo>
-                    <a:pt x="2372234" y="2997830"/>
-                  </a:lnTo>
-                  <a:lnTo>
-                    <a:pt x="2443857" y="3025884"/>
-                  </a:lnTo>
-                  <a:lnTo>
-                    <a:pt x="2515479" y="3052318"/>
-                  </a:lnTo>
-                  <a:lnTo>
-                    <a:pt x="2587102" y="3077226"/>
-                  </a:lnTo>
-                  <a:lnTo>
-                    <a:pt x="2658724" y="3100695"/>
-                  </a:lnTo>
-                  <a:lnTo>
-                    <a:pt x="2730347" y="3122810"/>
-                  </a:lnTo>
-                  <a:lnTo>
-                    <a:pt x="2801969" y="3143649"/>
-                  </a:lnTo>
-                  <a:lnTo>
-                    <a:pt x="2873592" y="3163284"/>
-                  </a:lnTo>
-                  <a:lnTo>
-                    <a:pt x="2945214" y="3181785"/>
-                  </a:lnTo>
-                  <a:lnTo>
-                    <a:pt x="3016837" y="3199218"/>
-                  </a:lnTo>
-                  <a:lnTo>
-                    <a:pt x="3088459" y="3215645"/>
-                  </a:lnTo>
-                  <a:lnTo>
-                    <a:pt x="3160082" y="3231124"/>
-                  </a:lnTo>
-                  <a:lnTo>
-                    <a:pt x="3231704" y="3245708"/>
-                  </a:lnTo>
-                  <a:lnTo>
-                    <a:pt x="3303327" y="3259451"/>
-                  </a:lnTo>
-                  <a:lnTo>
-                    <a:pt x="3374950" y="3272401"/>
-                  </a:lnTo>
-                  <a:lnTo>
-                    <a:pt x="3446572" y="3284602"/>
-                  </a:lnTo>
-                  <a:lnTo>
-                    <a:pt x="3518195" y="3296100"/>
-                  </a:lnTo>
-                  <a:lnTo>
-                    <a:pt x="3589817" y="3306933"/>
-                  </a:lnTo>
-                  <a:lnTo>
-                    <a:pt x="3661440" y="3317141"/>
-                  </a:lnTo>
-                  <a:lnTo>
-                    <a:pt x="3733062" y="3326760"/>
-                  </a:lnTo>
-                  <a:lnTo>
-                    <a:pt x="3804685" y="3335823"/>
-                  </a:lnTo>
-                  <a:lnTo>
-                    <a:pt x="3876307" y="3344364"/>
-                  </a:lnTo>
-                  <a:lnTo>
-                    <a:pt x="3947930" y="3352411"/>
-                  </a:lnTo>
-                  <a:lnTo>
-                    <a:pt x="4019552" y="3359993"/>
-                  </a:lnTo>
-                  <a:lnTo>
-                    <a:pt x="4091175" y="3367138"/>
-                  </a:lnTo>
-                  <a:lnTo>
-                    <a:pt x="4162797" y="3373870"/>
-                  </a:lnTo>
-                  <a:lnTo>
-                    <a:pt x="4234420" y="3380214"/>
+                    <a:pt x="2731" y="8137"/>
+                  </a:lnTo>
+                  <a:lnTo>
+                    <a:pt x="74354" y="209168"/>
+                  </a:lnTo>
+                  <a:lnTo>
+                    <a:pt x="145976" y="398571"/>
+                  </a:lnTo>
+                  <a:lnTo>
+                    <a:pt x="217599" y="577019"/>
+                  </a:lnTo>
+                  <a:lnTo>
+                    <a:pt x="289221" y="745145"/>
+                  </a:lnTo>
+                  <a:lnTo>
+                    <a:pt x="360844" y="903547"/>
+                  </a:lnTo>
+                  <a:lnTo>
+                    <a:pt x="432466" y="1052786"/>
+                  </a:lnTo>
+                  <a:lnTo>
+                    <a:pt x="504089" y="1193394"/>
+                  </a:lnTo>
+                  <a:lnTo>
+                    <a:pt x="575711" y="1325869"/>
+                  </a:lnTo>
+                  <a:lnTo>
+                    <a:pt x="647334" y="1450681"/>
+                  </a:lnTo>
+                  <a:lnTo>
+                    <a:pt x="718956" y="1568275"/>
+                  </a:lnTo>
+                  <a:lnTo>
+                    <a:pt x="790579" y="1679066"/>
+                  </a:lnTo>
+                  <a:lnTo>
+                    <a:pt x="862201" y="1783450"/>
+                  </a:lnTo>
+                  <a:lnTo>
+                    <a:pt x="933824" y="1881796"/>
+                  </a:lnTo>
+                  <a:lnTo>
+                    <a:pt x="1005446" y="1974453"/>
+                  </a:lnTo>
+                  <a:lnTo>
+                    <a:pt x="1077069" y="2061751"/>
+                  </a:lnTo>
+                  <a:lnTo>
+                    <a:pt x="1148692" y="2144000"/>
+                  </a:lnTo>
+                  <a:lnTo>
+                    <a:pt x="1220314" y="2221491"/>
+                  </a:lnTo>
+                  <a:lnTo>
+                    <a:pt x="1291937" y="2294501"/>
+                  </a:lnTo>
+                  <a:lnTo>
+                    <a:pt x="1363559" y="2363287"/>
+                  </a:lnTo>
+                  <a:lnTo>
+                    <a:pt x="1435182" y="2428095"/>
+                  </a:lnTo>
+                  <a:lnTo>
+                    <a:pt x="1506804" y="2489154"/>
+                  </a:lnTo>
+                  <a:lnTo>
+                    <a:pt x="1578427" y="2546682"/>
+                  </a:lnTo>
+                  <a:lnTo>
+                    <a:pt x="1650049" y="2600882"/>
+                  </a:lnTo>
+                  <a:lnTo>
+                    <a:pt x="1721672" y="2651947"/>
+                  </a:lnTo>
+                  <a:lnTo>
+                    <a:pt x="1793294" y="2700059"/>
+                  </a:lnTo>
+                  <a:lnTo>
+                    <a:pt x="1864917" y="2745388"/>
+                  </a:lnTo>
+                  <a:lnTo>
+                    <a:pt x="1936539" y="2788095"/>
+                  </a:lnTo>
+                  <a:lnTo>
+                    <a:pt x="2008162" y="2828331"/>
+                  </a:lnTo>
+                  <a:lnTo>
+                    <a:pt x="2079784" y="2866241"/>
+                  </a:lnTo>
+                  <a:lnTo>
+                    <a:pt x="2151407" y="2901958"/>
+                  </a:lnTo>
+                  <a:lnTo>
+                    <a:pt x="2223029" y="2935608"/>
+                  </a:lnTo>
+                  <a:lnTo>
+                    <a:pt x="2294652" y="2967313"/>
+                  </a:lnTo>
+                  <a:lnTo>
+                    <a:pt x="2366274" y="2997184"/>
+                  </a:lnTo>
+                  <a:lnTo>
+                    <a:pt x="2437897" y="3025327"/>
+                  </a:lnTo>
+                  <a:lnTo>
+                    <a:pt x="2509520" y="3051842"/>
+                  </a:lnTo>
+                  <a:lnTo>
+                    <a:pt x="2581142" y="3076823"/>
+                  </a:lnTo>
+                  <a:lnTo>
+                    <a:pt x="2652765" y="3100360"/>
+                  </a:lnTo>
+                  <a:lnTo>
+                    <a:pt x="2724387" y="3122535"/>
+                  </a:lnTo>
+                  <a:lnTo>
+                    <a:pt x="2796010" y="3143428"/>
+                  </a:lnTo>
+                  <a:lnTo>
+                    <a:pt x="2867632" y="3163112"/>
+                  </a:lnTo>
+                  <a:lnTo>
+                    <a:pt x="2939255" y="3181658"/>
+                  </a:lnTo>
+                  <a:lnTo>
+                    <a:pt x="3010877" y="3199131"/>
+                  </a:lnTo>
+                  <a:lnTo>
+                    <a:pt x="3082500" y="3215593"/>
+                  </a:lnTo>
+                  <a:lnTo>
+                    <a:pt x="3154122" y="3231103"/>
+                  </a:lnTo>
+                  <a:lnTo>
+                    <a:pt x="3225745" y="3245716"/>
+                  </a:lnTo>
+                  <a:lnTo>
+                    <a:pt x="3297367" y="3259484"/>
+                  </a:lnTo>
+                  <a:lnTo>
+                    <a:pt x="3368990" y="3272455"/>
+                  </a:lnTo>
+                  <a:lnTo>
+                    <a:pt x="3440612" y="3284676"/>
+                  </a:lnTo>
+                  <a:lnTo>
+                    <a:pt x="3512235" y="3296191"/>
+                  </a:lnTo>
+                  <a:lnTo>
+                    <a:pt x="3583857" y="3307039"/>
+                  </a:lnTo>
+                  <a:lnTo>
+                    <a:pt x="3655480" y="3317260"/>
+                  </a:lnTo>
+                  <a:lnTo>
+                    <a:pt x="3727102" y="3326889"/>
+                  </a:lnTo>
+                  <a:lnTo>
+                    <a:pt x="3798725" y="3335962"/>
+                  </a:lnTo>
+                  <a:lnTo>
+                    <a:pt x="3870348" y="3344510"/>
+                  </a:lnTo>
+                  <a:lnTo>
+                    <a:pt x="3941970" y="3352563"/>
+                  </a:lnTo>
+                  <a:lnTo>
+                    <a:pt x="4013593" y="3360151"/>
+                  </a:lnTo>
+                  <a:lnTo>
+                    <a:pt x="4085215" y="3367300"/>
+                  </a:lnTo>
+                  <a:lnTo>
+                    <a:pt x="4156838" y="3374035"/>
+                  </a:lnTo>
+                  <a:lnTo>
+                    <a:pt x="4228460" y="3380381"/>
                   </a:lnTo>
                 </a:path>
               </a:pathLst>
@@ -4145,7 +4145,7 @@
           </p:nvSpPr>
           <p:spPr>
             <a:xfrm>
-              <a:off x="5756448" y="2073503"/>
+              <a:off x="5759271" y="2073503"/>
               <a:ext cx="0" cy="3649639"/>
             </a:xfrm>
             <a:custGeom>
@@ -4188,7 +4188,7 @@
           </p:nvSpPr>
           <p:spPr>
             <a:xfrm>
-              <a:off x="4469314" y="2073503"/>
+              <a:off x="4504692" y="2073503"/>
               <a:ext cx="0" cy="3649639"/>
             </a:xfrm>
             <a:custGeom>
@@ -4231,7 +4231,7 @@
           </p:nvSpPr>
           <p:spPr>
             <a:xfrm>
-              <a:off x="6872676" y="2073503"/>
+              <a:off x="6871070" y="2073503"/>
               <a:ext cx="0" cy="3649639"/>
             </a:xfrm>
             <a:custGeom>
@@ -4504,7 +4504,7 @@
           </p:nvSpPr>
           <p:spPr>
             <a:xfrm>
-              <a:off x="3199861" y="5785772"/>
+              <a:off x="3201825" y="5785772"/>
               <a:ext cx="161574" cy="80101"/>
             </a:xfrm>
             <a:prstGeom prst="rect">
@@ -4550,7 +4550,7 @@
           </p:nvSpPr>
           <p:spPr>
             <a:xfrm>
-              <a:off x="5730225" y="5785772"/>
+              <a:off x="5727471" y="5785772"/>
               <a:ext cx="62179" cy="80101"/>
             </a:xfrm>
             <a:prstGeom prst="rect">
@@ -4596,7 +4596,7 @@
           </p:nvSpPr>
           <p:spPr>
             <a:xfrm>
-              <a:off x="8179802" y="5785772"/>
+              <a:off x="8172329" y="5785772"/>
               <a:ext cx="124358" cy="80101"/>
             </a:xfrm>
             <a:prstGeom prst="rect">
@@ -4767,7 +4767,7 @@
                   <a:latin typeface="Helvetica"/>
                   <a:cs typeface="Helvetica"/>
                 </a:rPr>
-                <a:t>subHR per 10 mL/min decline: 2.28 (1.40-3.72), p_Bonf = 0.006 (n = 6)  |  per IQR decline (Δ = 24.2): 7.36 (2.25-24.05)  |  IQR: [-13.0, 11.2]</a:t>
+                <a:t>subHR per 10 mL/min decline: 2.28 (1.40-3.72), p_Bonf = 0.006 (n = 6)  |  per IQR decline (Δ = 23.9): 7.16 (2.23-23.04)  |  IQR: [-12.7, 11.2]</a:t>
               </a:r>
             </a:p>
           </p:txBody>
